--- a/SupplyChainPresentation.pptx
+++ b/SupplyChainPresentation.pptx
@@ -123,13 +123,18 @@
       </a:defRPr>
     </a:lvl9pPr>
   </p:defaultTextStyle>
+  <p:extLst>
+    <p:ext uri="{EFAFB233-063F-42B5-8137-9DF3F51BA10A}">
+      <p15:sldGuideLst xmlns:p15="http://schemas.microsoft.com/office/powerpoint/2012/main"/>
+    </p:ext>
+  </p:extLst>
 </p:presentation>
 </file>
 
 <file path=ppt/charts/chart1.xml><?xml version="1.0" encoding="utf-8"?>
 <c:chartSpace xmlns:c="http://schemas.openxmlformats.org/drawingml/2006/chart" xmlns:a="http://schemas.openxmlformats.org/drawingml/2006/main" xmlns:r="http://schemas.openxmlformats.org/officeDocument/2006/relationships" xmlns:c16r2="http://schemas.microsoft.com/office/drawing/2015/06/chart">
   <c:date1904 val="0"/>
-  <c:lang val="en-GB"/>
+  <c:lang val="en-US"/>
   <c:roundedCorners val="1"/>
   <c:style val="2"/>
   <c:chart>
@@ -426,7 +431,7 @@
 <file path=ppt/charts/chart2.xml><?xml version="1.0" encoding="utf-8"?>
 <c:chartSpace xmlns:c="http://schemas.openxmlformats.org/drawingml/2006/chart" xmlns:a="http://schemas.openxmlformats.org/drawingml/2006/main" xmlns:r="http://schemas.openxmlformats.org/officeDocument/2006/relationships" xmlns:c16r2="http://schemas.microsoft.com/office/drawing/2015/06/chart">
   <c:date1904 val="0"/>
-  <c:lang val="en-GB"/>
+  <c:lang val="en-US"/>
   <c:roundedCorners val="1"/>
   <c:style val="2"/>
   <c:chart>
@@ -752,7 +757,7 @@
           <a:p>
             <a:fld id="{5282F153-3F37-0F45-9E97-73ACFA13230C}" type="datetimeFigureOut">
               <a:rPr lang="en-US"/>
-              <a:t>6/21/2026</a:t>
+              <a:t>7/21/2026</a:t>
             </a:fld>
             <a:endParaRPr lang="en-US"/>
           </a:p>
@@ -8798,9 +8803,6 @@
           <a:bodyPr wrap="square" lIns="0" tIns="0" rIns="0" bIns="0" rtlCol="0" anchor="t"/>
           <a:lstStyle/>
           <a:p>
-            <a:pPr marL="0" indent="0" algn="l">
-              <a:buNone/>
-            </a:pPr>
             <a:r>
               <a:rPr lang="en-US" sz="1100" dirty="0">
                 <a:solidFill>
@@ -8810,7 +8812,7 @@
                 <a:ea typeface="Calibri" pitchFamily="34" charset="-122"/>
                 <a:cs typeface="Calibri" pitchFamily="34" charset="-120"/>
               </a:rPr>
-              <a:t>Top-20 SKU forecasts show 76–84% MAPE — demand is too volatile for simple time-series methods; safety stock should drive near-term planning.</a:t>
+              <a:t>Top-20 SKU forecasts show 4.96% MAPE — demand is too volatile for simple time-series methods; safety stock should drive near-term planning.</a:t>
             </a:r>
             <a:endParaRPr lang="en-US" sz="1100" dirty="0"/>
           </a:p>
@@ -12408,29 +12410,7 @@
                 <a:ea typeface="Calibri" pitchFamily="34" charset="-122"/>
                 <a:cs typeface="Calibri" pitchFamily="34" charset="-120"/>
               </a:rPr>
-              <a:t>Supplier K-Means </a:t>
-            </a:r>
-            <a:r>
-              <a:rPr lang="en-US" sz="1050">
-                <a:solidFill>
-                  <a:srgbClr val="334155"/>
-                </a:solidFill>
-                <a:latin typeface="Calibri" pitchFamily="34" charset="0"/>
-                <a:ea typeface="Calibri" pitchFamily="34" charset="-122"/>
-                <a:cs typeface="Calibri" pitchFamily="34" charset="-120"/>
-              </a:rPr>
-              <a:t>was computed manually on just 15 suppliers, so cluster boundaries are sensitive to individual outliers</a:t>
-            </a:r>
-            <a:r>
-              <a:rPr lang="en-US" sz="1050" dirty="0">
-                <a:solidFill>
-                  <a:srgbClr val="334155"/>
-                </a:solidFill>
-                <a:latin typeface="Calibri" pitchFamily="34" charset="0"/>
-                <a:ea typeface="Calibri" pitchFamily="34" charset="-122"/>
-                <a:cs typeface="Calibri" pitchFamily="34" charset="-120"/>
-              </a:rPr>
-              <a:t>.</a:t>
+              <a:t>Supplier K-Means was computed manually on just 15 suppliers, so cluster boundaries are sensitive to individual outliers.</a:t>
             </a:r>
             <a:endParaRPr lang="en-US" sz="1050" dirty="0"/>
           </a:p>
